--- a/16週兒童藝術生命教育課程_上課簡報.pptx
+++ b/16週兒童藝術生命教育課程_上課簡報.pptx
@@ -34,6 +34,7 @@
     <p:sldId id="282" r:id="rId33"/>
     <p:sldId id="283" r:id="rId34"/>
     <p:sldId id="284" r:id="rId35"/>
+    <p:sldId id="285" r:id="rId36"/>
   </p:sldIdLst>
   <p:sldSz cx="12191695" cy="6858000" type="screen4x3"/>
   <p:notesSz cx="6858000" cy="9144000"/>
@@ -13315,857 +13316,6 @@
             <a:avLst/>
           </a:prstGeom>
           <a:solidFill>
-            <a:srgbClr val="E5732B"/>
-          </a:solidFill>
-          <a:ln>
-            <a:noFill/>
-          </a:ln>
-          <a:effectLst/>
-        </p:spPr>
-        <p:style>
-          <a:lnRef idx="1">
-            <a:schemeClr val="accent1"/>
-          </a:lnRef>
-          <a:fillRef idx="3">
-            <a:schemeClr val="accent1"/>
-          </a:fillRef>
-          <a:effectRef idx="2">
-            <a:schemeClr val="accent1"/>
-          </a:effectRef>
-          <a:fontRef idx="minor">
-            <a:schemeClr val="lt1"/>
-          </a:fontRef>
-        </p:style>
-        <p:txBody>
-          <a:bodyPr rtlCol="0" anchor="ctr"/>
-          <a:lstStyle/>
-          <a:p>
-            <a:pPr algn="ctr"/>
-          </a:p>
-        </p:txBody>
-      </p:sp>
-      <p:sp>
-        <p:nvSpPr>
-          <p:cNvPr id="4" name="TextBox 3"/>
-          <p:cNvSpPr txBox="1"/>
-          <p:nvPr/>
-        </p:nvSpPr>
-        <p:spPr>
-          <a:xfrm>
-            <a:off x="548640" y="146304"/>
-            <a:ext cx="10972800" cy="640080"/>
-          </a:xfrm>
-          <a:prstGeom prst="rect">
-            <a:avLst/>
-          </a:prstGeom>
-          <a:noFill/>
-        </p:spPr>
-        <p:txBody>
-          <a:bodyPr wrap="square" anchor="t" lIns="50800" rIns="50800" tIns="25400" bIns="25400">
-            <a:spAutoFit/>
-          </a:bodyPr>
-          <a:lstStyle/>
-          <a:p>
-            <a:pPr algn="l">
-              <a:lnSpc>
-                <a:spcPct val="100000"/>
-              </a:lnSpc>
-              <a:spcAft>
-                <a:spcPts val="600"/>
-              </a:spcAft>
-            </a:pPr>
-            <a:r>
-              <a:rPr sz="2600" b="1">
-                <a:solidFill>
-                  <a:srgbClr val="FFFFFF"/>
-                </a:solidFill>
-                <a:latin typeface="微軟正黑體"/>
-                <a:ea typeface="微軟正黑體"/>
-                <a:cs typeface="微軟正黑體"/>
-              </a:rPr>
-              <a:t>16 週學期行事曆（★=作品需陰乾跨週）</a:t>
-            </a:r>
-          </a:p>
-        </p:txBody>
-      </p:sp>
-      <p:sp>
-        <p:nvSpPr>
-          <p:cNvPr id="5" name="Rectangle 4"/>
-          <p:cNvSpPr/>
-          <p:nvPr/>
-        </p:nvSpPr>
-        <p:spPr>
-          <a:xfrm>
-            <a:off x="640080" y="1417320"/>
-            <a:ext cx="2743200" cy="1737360"/>
-          </a:xfrm>
-          <a:prstGeom prst="rect">
-            <a:avLst/>
-          </a:prstGeom>
-          <a:solidFill>
-            <a:srgbClr val="5A48B0"/>
-          </a:solidFill>
-          <a:ln>
-            <a:noFill/>
-          </a:ln>
-          <a:effectLst/>
-        </p:spPr>
-        <p:style>
-          <a:lnRef idx="1">
-            <a:schemeClr val="accent1"/>
-          </a:lnRef>
-          <a:fillRef idx="3">
-            <a:schemeClr val="accent1"/>
-          </a:fillRef>
-          <a:effectRef idx="2">
-            <a:schemeClr val="accent1"/>
-          </a:effectRef>
-          <a:fontRef idx="minor">
-            <a:schemeClr val="lt1"/>
-          </a:fontRef>
-        </p:style>
-        <p:txBody>
-          <a:bodyPr rtlCol="0" anchor="ctr"/>
-          <a:lstStyle/>
-          <a:p>
-            <a:pPr algn="ctr"/>
-          </a:p>
-        </p:txBody>
-      </p:sp>
-      <p:sp>
-        <p:nvSpPr>
-          <p:cNvPr id="6" name="TextBox 5"/>
-          <p:cNvSpPr txBox="1"/>
-          <p:nvPr/>
-        </p:nvSpPr>
-        <p:spPr>
-          <a:xfrm>
-            <a:off x="777240" y="1600200"/>
-            <a:ext cx="2468880" cy="1371600"/>
-          </a:xfrm>
-          <a:prstGeom prst="rect">
-            <a:avLst/>
-          </a:prstGeom>
-          <a:noFill/>
-        </p:spPr>
-        <p:txBody>
-          <a:bodyPr wrap="square" anchor="ctr" lIns="50800" rIns="50800" tIns="25400" bIns="25400">
-            <a:spAutoFit/>
-          </a:bodyPr>
-          <a:lstStyle/>
-          <a:p>
-            <a:pPr algn="ctr">
-              <a:lnSpc>
-                <a:spcPct val="110000"/>
-              </a:lnSpc>
-              <a:spcAft>
-                <a:spcPts val="600"/>
-              </a:spcAft>
-            </a:pPr>
-            <a:r>
-              <a:rPr sz="2000" b="1">
-                <a:solidFill>
-                  <a:srgbClr val="FFE082"/>
-                </a:solidFill>
-                <a:latin typeface="微軟正黑體"/>
-                <a:ea typeface="微軟正黑體"/>
-                <a:cs typeface="微軟正黑體"/>
-              </a:rPr>
-              <a:t>W1–2</a:t>
-            </a:r>
-          </a:p>
-          <a:p>
-            <a:pPr algn="ctr">
-              <a:lnSpc>
-                <a:spcPct val="110000"/>
-              </a:lnSpc>
-              <a:spcAft>
-                <a:spcPts val="600"/>
-              </a:spcAft>
-            </a:pPr>
-            <a:r>
-              <a:rPr sz="1700" b="1">
-                <a:solidFill>
-                  <a:srgbClr val="FFFFFF"/>
-                </a:solidFill>
-                <a:latin typeface="微軟正黑體"/>
-                <a:ea typeface="微軟正黑體"/>
-                <a:cs typeface="微軟正黑體"/>
-              </a:rPr>
-              <a:t>作品1 魔法小宇宙</a:t>
-            </a:r>
-          </a:p>
-        </p:txBody>
-      </p:sp>
-      <p:sp>
-        <p:nvSpPr>
-          <p:cNvPr id="7" name="Rectangle 6"/>
-          <p:cNvSpPr/>
-          <p:nvPr/>
-        </p:nvSpPr>
-        <p:spPr>
-          <a:xfrm>
-            <a:off x="3547872" y="1417320"/>
-            <a:ext cx="2743200" cy="1737360"/>
-          </a:xfrm>
-          <a:prstGeom prst="rect">
-            <a:avLst/>
-          </a:prstGeom>
-          <a:solidFill>
-            <a:srgbClr val="7CB342"/>
-          </a:solidFill>
-          <a:ln>
-            <a:noFill/>
-          </a:ln>
-          <a:effectLst/>
-        </p:spPr>
-        <p:style>
-          <a:lnRef idx="1">
-            <a:schemeClr val="accent1"/>
-          </a:lnRef>
-          <a:fillRef idx="3">
-            <a:schemeClr val="accent1"/>
-          </a:fillRef>
-          <a:effectRef idx="2">
-            <a:schemeClr val="accent1"/>
-          </a:effectRef>
-          <a:fontRef idx="minor">
-            <a:schemeClr val="lt1"/>
-          </a:fontRef>
-        </p:style>
-        <p:txBody>
-          <a:bodyPr rtlCol="0" anchor="ctr"/>
-          <a:lstStyle/>
-          <a:p>
-            <a:pPr algn="ctr"/>
-          </a:p>
-        </p:txBody>
-      </p:sp>
-      <p:sp>
-        <p:nvSpPr>
-          <p:cNvPr id="8" name="TextBox 7"/>
-          <p:cNvSpPr txBox="1"/>
-          <p:nvPr/>
-        </p:nvSpPr>
-        <p:spPr>
-          <a:xfrm>
-            <a:off x="3685032" y="1600200"/>
-            <a:ext cx="2468880" cy="1371600"/>
-          </a:xfrm>
-          <a:prstGeom prst="rect">
-            <a:avLst/>
-          </a:prstGeom>
-          <a:noFill/>
-        </p:spPr>
-        <p:txBody>
-          <a:bodyPr wrap="square" anchor="ctr" lIns="50800" rIns="50800" tIns="25400" bIns="25400">
-            <a:spAutoFit/>
-          </a:bodyPr>
-          <a:lstStyle/>
-          <a:p>
-            <a:pPr algn="ctr">
-              <a:lnSpc>
-                <a:spcPct val="110000"/>
-              </a:lnSpc>
-              <a:spcAft>
-                <a:spcPts val="600"/>
-              </a:spcAft>
-            </a:pPr>
-            <a:r>
-              <a:rPr sz="2000" b="1">
-                <a:solidFill>
-                  <a:srgbClr val="FFE082"/>
-                </a:solidFill>
-                <a:latin typeface="微軟正黑體"/>
-                <a:ea typeface="微軟正黑體"/>
-                <a:cs typeface="微軟正黑體"/>
-              </a:rPr>
-              <a:t>W3–4 ★</a:t>
-            </a:r>
-          </a:p>
-          <a:p>
-            <a:pPr algn="ctr">
-              <a:lnSpc>
-                <a:spcPct val="110000"/>
-              </a:lnSpc>
-              <a:spcAft>
-                <a:spcPts val="600"/>
-              </a:spcAft>
-            </a:pPr>
-            <a:r>
-              <a:rPr sz="1700" b="1">
-                <a:solidFill>
-                  <a:srgbClr val="FFFFFF"/>
-                </a:solidFill>
-                <a:latin typeface="微軟正黑體"/>
-                <a:ea typeface="微軟正黑體"/>
-                <a:cs typeface="微軟正黑體"/>
-              </a:rPr>
-              <a:t>作品2 種子寶寶的家</a:t>
-            </a:r>
-          </a:p>
-        </p:txBody>
-      </p:sp>
-      <p:sp>
-        <p:nvSpPr>
-          <p:cNvPr id="9" name="Rectangle 8"/>
-          <p:cNvSpPr/>
-          <p:nvPr/>
-        </p:nvSpPr>
-        <p:spPr>
-          <a:xfrm>
-            <a:off x="6455664" y="1417320"/>
-            <a:ext cx="2743200" cy="1737360"/>
-          </a:xfrm>
-          <a:prstGeom prst="rect">
-            <a:avLst/>
-          </a:prstGeom>
-          <a:solidFill>
-            <a:srgbClr val="42A5F5"/>
-          </a:solidFill>
-          <a:ln>
-            <a:noFill/>
-          </a:ln>
-          <a:effectLst/>
-        </p:spPr>
-        <p:style>
-          <a:lnRef idx="1">
-            <a:schemeClr val="accent1"/>
-          </a:lnRef>
-          <a:fillRef idx="3">
-            <a:schemeClr val="accent1"/>
-          </a:fillRef>
-          <a:effectRef idx="2">
-            <a:schemeClr val="accent1"/>
-          </a:effectRef>
-          <a:fontRef idx="minor">
-            <a:schemeClr val="lt1"/>
-          </a:fontRef>
-        </p:style>
-        <p:txBody>
-          <a:bodyPr rtlCol="0" anchor="ctr"/>
-          <a:lstStyle/>
-          <a:p>
-            <a:pPr algn="ctr"/>
-          </a:p>
-        </p:txBody>
-      </p:sp>
-      <p:sp>
-        <p:nvSpPr>
-          <p:cNvPr id="10" name="TextBox 9"/>
-          <p:cNvSpPr txBox="1"/>
-          <p:nvPr/>
-        </p:nvSpPr>
-        <p:spPr>
-          <a:xfrm>
-            <a:off x="6592824" y="1600200"/>
-            <a:ext cx="2468880" cy="1371600"/>
-          </a:xfrm>
-          <a:prstGeom prst="rect">
-            <a:avLst/>
-          </a:prstGeom>
-          <a:noFill/>
-        </p:spPr>
-        <p:txBody>
-          <a:bodyPr wrap="square" anchor="ctr" lIns="50800" rIns="50800" tIns="25400" bIns="25400">
-            <a:spAutoFit/>
-          </a:bodyPr>
-          <a:lstStyle/>
-          <a:p>
-            <a:pPr algn="ctr">
-              <a:lnSpc>
-                <a:spcPct val="110000"/>
-              </a:lnSpc>
-              <a:spcAft>
-                <a:spcPts val="600"/>
-              </a:spcAft>
-            </a:pPr>
-            <a:r>
-              <a:rPr sz="2000" b="1">
-                <a:solidFill>
-                  <a:srgbClr val="FFE082"/>
-                </a:solidFill>
-                <a:latin typeface="微軟正黑體"/>
-                <a:ea typeface="微軟正黑體"/>
-                <a:cs typeface="微軟正黑體"/>
-              </a:rPr>
-              <a:t>W5–6</a:t>
-            </a:r>
-          </a:p>
-          <a:p>
-            <a:pPr algn="ctr">
-              <a:lnSpc>
-                <a:spcPct val="110000"/>
-              </a:lnSpc>
-              <a:spcAft>
-                <a:spcPts val="600"/>
-              </a:spcAft>
-            </a:pPr>
-            <a:r>
-              <a:rPr sz="1700" b="1">
-                <a:solidFill>
-                  <a:srgbClr val="FFFFFF"/>
-                </a:solidFill>
-                <a:latin typeface="微軟正黑體"/>
-                <a:ea typeface="微軟正黑體"/>
-                <a:cs typeface="微軟正黑體"/>
-              </a:rPr>
-              <a:t>作品3 手牽手好朋友</a:t>
-            </a:r>
-          </a:p>
-        </p:txBody>
-      </p:sp>
-      <p:sp>
-        <p:nvSpPr>
-          <p:cNvPr id="11" name="Rectangle 10"/>
-          <p:cNvSpPr/>
-          <p:nvPr/>
-        </p:nvSpPr>
-        <p:spPr>
-          <a:xfrm>
-            <a:off x="9363456" y="1417320"/>
-            <a:ext cx="2743200" cy="1737360"/>
-          </a:xfrm>
-          <a:prstGeom prst="rect">
-            <a:avLst/>
-          </a:prstGeom>
-          <a:solidFill>
-            <a:srgbClr val="EF7043"/>
-          </a:solidFill>
-          <a:ln>
-            <a:noFill/>
-          </a:ln>
-          <a:effectLst/>
-        </p:spPr>
-        <p:style>
-          <a:lnRef idx="1">
-            <a:schemeClr val="accent1"/>
-          </a:lnRef>
-          <a:fillRef idx="3">
-            <a:schemeClr val="accent1"/>
-          </a:fillRef>
-          <a:effectRef idx="2">
-            <a:schemeClr val="accent1"/>
-          </a:effectRef>
-          <a:fontRef idx="minor">
-            <a:schemeClr val="lt1"/>
-          </a:fontRef>
-        </p:style>
-        <p:txBody>
-          <a:bodyPr rtlCol="0" anchor="ctr"/>
-          <a:lstStyle/>
-          <a:p>
-            <a:pPr algn="ctr"/>
-          </a:p>
-        </p:txBody>
-      </p:sp>
-      <p:sp>
-        <p:nvSpPr>
-          <p:cNvPr id="12" name="TextBox 11"/>
-          <p:cNvSpPr txBox="1"/>
-          <p:nvPr/>
-        </p:nvSpPr>
-        <p:spPr>
-          <a:xfrm>
-            <a:off x="9500616" y="1600200"/>
-            <a:ext cx="2468880" cy="1371600"/>
-          </a:xfrm>
-          <a:prstGeom prst="rect">
-            <a:avLst/>
-          </a:prstGeom>
-          <a:noFill/>
-        </p:spPr>
-        <p:txBody>
-          <a:bodyPr wrap="square" anchor="ctr" lIns="50800" rIns="50800" tIns="25400" bIns="25400">
-            <a:spAutoFit/>
-          </a:bodyPr>
-          <a:lstStyle/>
-          <a:p>
-            <a:pPr algn="ctr">
-              <a:lnSpc>
-                <a:spcPct val="110000"/>
-              </a:lnSpc>
-              <a:spcAft>
-                <a:spcPts val="600"/>
-              </a:spcAft>
-            </a:pPr>
-            <a:r>
-              <a:rPr sz="2000" b="1">
-                <a:solidFill>
-                  <a:srgbClr val="FFE082"/>
-                </a:solidFill>
-                <a:latin typeface="微軟正黑體"/>
-                <a:ea typeface="微軟正黑體"/>
-                <a:cs typeface="微軟正黑體"/>
-              </a:rPr>
-              <a:t>W7–8 ★</a:t>
-            </a:r>
-          </a:p>
-          <a:p>
-            <a:pPr algn="ctr">
-              <a:lnSpc>
-                <a:spcPct val="110000"/>
-              </a:lnSpc>
-              <a:spcAft>
-                <a:spcPts val="600"/>
-              </a:spcAft>
-            </a:pPr>
-            <a:r>
-              <a:rPr sz="1700" b="1">
-                <a:solidFill>
-                  <a:srgbClr val="FFFFFF"/>
-                </a:solidFill>
-                <a:latin typeface="微軟正黑體"/>
-                <a:ea typeface="微軟正黑體"/>
-                <a:cs typeface="微軟正黑體"/>
-              </a:rPr>
-              <a:t>作品4 溫暖小屋</a:t>
-            </a:r>
-          </a:p>
-        </p:txBody>
-      </p:sp>
-      <p:sp>
-        <p:nvSpPr>
-          <p:cNvPr id="13" name="Rectangle 12"/>
-          <p:cNvSpPr/>
-          <p:nvPr/>
-        </p:nvSpPr>
-        <p:spPr>
-          <a:xfrm>
-            <a:off x="640080" y="3383280"/>
-            <a:ext cx="2743200" cy="1737360"/>
-          </a:xfrm>
-          <a:prstGeom prst="rect">
-            <a:avLst/>
-          </a:prstGeom>
-          <a:solidFill>
-            <a:srgbClr val="AB7DF0"/>
-          </a:solidFill>
-          <a:ln>
-            <a:noFill/>
-          </a:ln>
-          <a:effectLst/>
-        </p:spPr>
-        <p:style>
-          <a:lnRef idx="1">
-            <a:schemeClr val="accent1"/>
-          </a:lnRef>
-          <a:fillRef idx="3">
-            <a:schemeClr val="accent1"/>
-          </a:fillRef>
-          <a:effectRef idx="2">
-            <a:schemeClr val="accent1"/>
-          </a:effectRef>
-          <a:fontRef idx="minor">
-            <a:schemeClr val="lt1"/>
-          </a:fontRef>
-        </p:style>
-        <p:txBody>
-          <a:bodyPr rtlCol="0" anchor="ctr"/>
-          <a:lstStyle/>
-          <a:p>
-            <a:pPr algn="ctr"/>
-          </a:p>
-        </p:txBody>
-      </p:sp>
-      <p:sp>
-        <p:nvSpPr>
-          <p:cNvPr id="14" name="TextBox 13"/>
-          <p:cNvSpPr txBox="1"/>
-          <p:nvPr/>
-        </p:nvSpPr>
-        <p:spPr>
-          <a:xfrm>
-            <a:off x="777240" y="3566160"/>
-            <a:ext cx="2468880" cy="1371600"/>
-          </a:xfrm>
-          <a:prstGeom prst="rect">
-            <a:avLst/>
-          </a:prstGeom>
-          <a:noFill/>
-        </p:spPr>
-        <p:txBody>
-          <a:bodyPr wrap="square" anchor="ctr" lIns="50800" rIns="50800" tIns="25400" bIns="25400">
-            <a:spAutoFit/>
-          </a:bodyPr>
-          <a:lstStyle/>
-          <a:p>
-            <a:pPr algn="ctr">
-              <a:lnSpc>
-                <a:spcPct val="110000"/>
-              </a:lnSpc>
-              <a:spcAft>
-                <a:spcPts val="600"/>
-              </a:spcAft>
-            </a:pPr>
-            <a:r>
-              <a:rPr sz="2000" b="1">
-                <a:solidFill>
-                  <a:srgbClr val="FFE082"/>
-                </a:solidFill>
-                <a:latin typeface="微軟正黑體"/>
-                <a:ea typeface="微軟正黑體"/>
-                <a:cs typeface="微軟正黑體"/>
-              </a:rPr>
-              <a:t>W9–10</a:t>
-            </a:r>
-          </a:p>
-          <a:p>
-            <a:pPr algn="ctr">
-              <a:lnSpc>
-                <a:spcPct val="110000"/>
-              </a:lnSpc>
-              <a:spcAft>
-                <a:spcPts val="600"/>
-              </a:spcAft>
-            </a:pPr>
-            <a:r>
-              <a:rPr sz="1700" b="1">
-                <a:solidFill>
-                  <a:srgbClr val="FFFFFF"/>
-                </a:solidFill>
-                <a:latin typeface="微軟正黑體"/>
-                <a:ea typeface="微軟正黑體"/>
-                <a:cs typeface="微軟正黑體"/>
-              </a:rPr>
-              <a:t>作品5 大自然書籤</a:t>
-            </a:r>
-          </a:p>
-        </p:txBody>
-      </p:sp>
-      <p:sp>
-        <p:nvSpPr>
-          <p:cNvPr id="15" name="Rectangle 14"/>
-          <p:cNvSpPr/>
-          <p:nvPr/>
-        </p:nvSpPr>
-        <p:spPr>
-          <a:xfrm>
-            <a:off x="3547872" y="3383280"/>
-            <a:ext cx="2743200" cy="1737360"/>
-          </a:xfrm>
-          <a:prstGeom prst="rect">
-            <a:avLst/>
-          </a:prstGeom>
-          <a:solidFill>
-            <a:srgbClr val="039BE5"/>
-          </a:solidFill>
-          <a:ln>
-            <a:noFill/>
-          </a:ln>
-          <a:effectLst/>
-        </p:spPr>
-        <p:style>
-          <a:lnRef idx="1">
-            <a:schemeClr val="accent1"/>
-          </a:lnRef>
-          <a:fillRef idx="3">
-            <a:schemeClr val="accent1"/>
-          </a:fillRef>
-          <a:effectRef idx="2">
-            <a:schemeClr val="accent1"/>
-          </a:effectRef>
-          <a:fontRef idx="minor">
-            <a:schemeClr val="lt1"/>
-          </a:fontRef>
-        </p:style>
-        <p:txBody>
-          <a:bodyPr rtlCol="0" anchor="ctr"/>
-          <a:lstStyle/>
-          <a:p>
-            <a:pPr algn="ctr"/>
-          </a:p>
-        </p:txBody>
-      </p:sp>
-      <p:sp>
-        <p:nvSpPr>
-          <p:cNvPr id="16" name="TextBox 15"/>
-          <p:cNvSpPr txBox="1"/>
-          <p:nvPr/>
-        </p:nvSpPr>
-        <p:spPr>
-          <a:xfrm>
-            <a:off x="3685032" y="3566160"/>
-            <a:ext cx="2468880" cy="1371600"/>
-          </a:xfrm>
-          <a:prstGeom prst="rect">
-            <a:avLst/>
-          </a:prstGeom>
-          <a:noFill/>
-        </p:spPr>
-        <p:txBody>
-          <a:bodyPr wrap="square" anchor="ctr" lIns="50800" rIns="50800" tIns="25400" bIns="25400">
-            <a:spAutoFit/>
-          </a:bodyPr>
-          <a:lstStyle/>
-          <a:p>
-            <a:pPr algn="ctr">
-              <a:lnSpc>
-                <a:spcPct val="110000"/>
-              </a:lnSpc>
-              <a:spcAft>
-                <a:spcPts val="600"/>
-              </a:spcAft>
-            </a:pPr>
-            <a:r>
-              <a:rPr sz="2000" b="1">
-                <a:solidFill>
-                  <a:srgbClr val="FFE082"/>
-                </a:solidFill>
-                <a:latin typeface="微軟正黑體"/>
-                <a:ea typeface="微軟正黑體"/>
-                <a:cs typeface="微軟正黑體"/>
-              </a:rPr>
-              <a:t>W11–12 ★</a:t>
-            </a:r>
-          </a:p>
-          <a:p>
-            <a:pPr algn="ctr">
-              <a:lnSpc>
-                <a:spcPct val="110000"/>
-              </a:lnSpc>
-              <a:spcAft>
-                <a:spcPts val="600"/>
-              </a:spcAft>
-            </a:pPr>
-            <a:r>
-              <a:rPr sz="1700" b="1">
-                <a:solidFill>
-                  <a:srgbClr val="FFFFFF"/>
-                </a:solidFill>
-                <a:latin typeface="微軟正黑體"/>
-                <a:ea typeface="微軟正黑體"/>
-                <a:cs typeface="微軟正黑體"/>
-              </a:rPr>
-              <a:t>作品6 海底好朋友</a:t>
-            </a:r>
-          </a:p>
-        </p:txBody>
-      </p:sp>
-      <p:sp>
-        <p:nvSpPr>
-          <p:cNvPr id="17" name="Rectangle 16"/>
-          <p:cNvSpPr/>
-          <p:nvPr/>
-        </p:nvSpPr>
-        <p:spPr>
-          <a:xfrm>
-            <a:off x="6455664" y="3383280"/>
-            <a:ext cx="2743200" cy="1737360"/>
-          </a:xfrm>
-          <a:prstGeom prst="rect">
-            <a:avLst/>
-          </a:prstGeom>
-          <a:solidFill>
-            <a:srgbClr val="EC6FA0"/>
-          </a:solidFill>
-          <a:ln>
-            <a:noFill/>
-          </a:ln>
-          <a:effectLst/>
-        </p:spPr>
-        <p:style>
-          <a:lnRef idx="1">
-            <a:schemeClr val="accent1"/>
-          </a:lnRef>
-          <a:fillRef idx="3">
-            <a:schemeClr val="accent1"/>
-          </a:fillRef>
-          <a:effectRef idx="2">
-            <a:schemeClr val="accent1"/>
-          </a:effectRef>
-          <a:fontRef idx="minor">
-            <a:schemeClr val="lt1"/>
-          </a:fontRef>
-        </p:style>
-        <p:txBody>
-          <a:bodyPr rtlCol="0" anchor="ctr"/>
-          <a:lstStyle/>
-          <a:p>
-            <a:pPr algn="ctr"/>
-          </a:p>
-        </p:txBody>
-      </p:sp>
-      <p:sp>
-        <p:nvSpPr>
-          <p:cNvPr id="18" name="TextBox 17"/>
-          <p:cNvSpPr txBox="1"/>
-          <p:nvPr/>
-        </p:nvSpPr>
-        <p:spPr>
-          <a:xfrm>
-            <a:off x="6592824" y="3566160"/>
-            <a:ext cx="2468880" cy="1371600"/>
-          </a:xfrm>
-          <a:prstGeom prst="rect">
-            <a:avLst/>
-          </a:prstGeom>
-          <a:noFill/>
-        </p:spPr>
-        <p:txBody>
-          <a:bodyPr wrap="square" anchor="ctr" lIns="50800" rIns="50800" tIns="25400" bIns="25400">
-            <a:spAutoFit/>
-          </a:bodyPr>
-          <a:lstStyle/>
-          <a:p>
-            <a:pPr algn="ctr">
-              <a:lnSpc>
-                <a:spcPct val="110000"/>
-              </a:lnSpc>
-              <a:spcAft>
-                <a:spcPts val="600"/>
-              </a:spcAft>
-            </a:pPr>
-            <a:r>
-              <a:rPr sz="2000" b="1">
-                <a:solidFill>
-                  <a:srgbClr val="FFE082"/>
-                </a:solidFill>
-                <a:latin typeface="微軟正黑體"/>
-                <a:ea typeface="微軟正黑體"/>
-                <a:cs typeface="微軟正黑體"/>
-              </a:rPr>
-              <a:t>W13–14</a:t>
-            </a:r>
-          </a:p>
-          <a:p>
-            <a:pPr algn="ctr">
-              <a:lnSpc>
-                <a:spcPct val="110000"/>
-              </a:lnSpc>
-              <a:spcAft>
-                <a:spcPts val="600"/>
-              </a:spcAft>
-            </a:pPr>
-            <a:r>
-              <a:rPr sz="1700" b="1">
-                <a:solidFill>
-                  <a:srgbClr val="FFFFFF"/>
-                </a:solidFill>
-                <a:latin typeface="微軟正黑體"/>
-                <a:ea typeface="微軟正黑體"/>
-                <a:cs typeface="微軟正黑體"/>
-              </a:rPr>
-              <a:t>作品7 毛毛蟲變蝴蝶</a:t>
-            </a:r>
-          </a:p>
-        </p:txBody>
-      </p:sp>
-      <p:sp>
-        <p:nvSpPr>
-          <p:cNvPr id="19" name="Rectangle 18"/>
-          <p:cNvSpPr/>
-          <p:nvPr/>
-        </p:nvSpPr>
-        <p:spPr>
-          <a:xfrm>
-            <a:off x="9363456" y="3383280"/>
-            <a:ext cx="2743200" cy="1737360"/>
-          </a:xfrm>
-          <a:prstGeom prst="rect">
-            <a:avLst/>
-          </a:prstGeom>
-          <a:solidFill>
             <a:srgbClr val="43A047"/>
           </a:solidFill>
           <a:ln>
@@ -14197,14 +13347,102 @@
       </p:sp>
       <p:sp>
         <p:nvSpPr>
-          <p:cNvPr id="20" name="TextBox 19"/>
+          <p:cNvPr id="4" name="TextBox 3"/>
           <p:cNvSpPr txBox="1"/>
           <p:nvPr/>
         </p:nvSpPr>
         <p:spPr>
           <a:xfrm>
-            <a:off x="9500616" y="3566160"/>
-            <a:ext cx="2468880" cy="1371600"/>
+            <a:off x="457200" y="128016"/>
+            <a:ext cx="11247120" cy="685800"/>
+          </a:xfrm>
+          <a:prstGeom prst="rect">
+            <a:avLst/>
+          </a:prstGeom>
+          <a:noFill/>
+        </p:spPr>
+        <p:txBody>
+          <a:bodyPr wrap="square" anchor="t" lIns="50800" rIns="50800" tIns="25400" bIns="25400">
+            <a:spAutoFit/>
+          </a:bodyPr>
+          <a:lstStyle/>
+          <a:p>
+            <a:pPr algn="l">
+              <a:lnSpc>
+                <a:spcPct val="100000"/>
+              </a:lnSpc>
+              <a:spcAft>
+                <a:spcPts val="600"/>
+              </a:spcAft>
+            </a:pPr>
+            <a:r>
+              <a:rPr sz="2400" b="1">
+                <a:solidFill>
+                  <a:srgbClr val="FFFFFF"/>
+                </a:solidFill>
+                <a:latin typeface="微軟正黑體"/>
+                <a:ea typeface="微軟正黑體"/>
+                <a:cs typeface="微軟正黑體"/>
+              </a:rPr>
+              <a:t>作品 8｜我的生命樹 — 學生作品範例（小一／小二）</a:t>
+            </a:r>
+          </a:p>
+        </p:txBody>
+      </p:sp>
+      <p:sp>
+        <p:nvSpPr>
+          <p:cNvPr id="5" name="Rectangle 4"/>
+          <p:cNvSpPr/>
+          <p:nvPr/>
+        </p:nvSpPr>
+        <p:spPr>
+          <a:xfrm>
+            <a:off x="411480" y="1143000"/>
+            <a:ext cx="5577840" cy="502920"/>
+          </a:xfrm>
+          <a:prstGeom prst="rect">
+            <a:avLst/>
+          </a:prstGeom>
+          <a:solidFill>
+            <a:srgbClr val="C6E2C7"/>
+          </a:solidFill>
+          <a:ln>
+            <a:noFill/>
+          </a:ln>
+          <a:effectLst/>
+        </p:spPr>
+        <p:style>
+          <a:lnRef idx="1">
+            <a:schemeClr val="accent1"/>
+          </a:lnRef>
+          <a:fillRef idx="3">
+            <a:schemeClr val="accent1"/>
+          </a:fillRef>
+          <a:effectRef idx="2">
+            <a:schemeClr val="accent1"/>
+          </a:effectRef>
+          <a:fontRef idx="minor">
+            <a:schemeClr val="lt1"/>
+          </a:fontRef>
+        </p:style>
+        <p:txBody>
+          <a:bodyPr rtlCol="0" anchor="ctr"/>
+          <a:lstStyle/>
+          <a:p>
+            <a:pPr algn="ctr"/>
+          </a:p>
+        </p:txBody>
+      </p:sp>
+      <p:sp>
+        <p:nvSpPr>
+          <p:cNvPr id="6" name="TextBox 5"/>
+          <p:cNvSpPr txBox="1"/>
+          <p:nvPr/>
+        </p:nvSpPr>
+        <p:spPr>
+          <a:xfrm>
+            <a:off x="411480" y="1197864"/>
+            <a:ext cx="5577840" cy="411480"/>
           </a:xfrm>
           <a:prstGeom prst="rect">
             <a:avLst/>
@@ -14219,47 +13457,162 @@
           <a:p>
             <a:pPr algn="ctr">
               <a:lnSpc>
-                <a:spcPct val="110000"/>
+                <a:spcPct val="100000"/>
               </a:lnSpc>
               <a:spcAft>
                 <a:spcPts val="600"/>
               </a:spcAft>
             </a:pPr>
             <a:r>
-              <a:rPr sz="2000" b="1">
-                <a:solidFill>
-                  <a:srgbClr val="FFE082"/>
-                </a:solidFill>
-                <a:latin typeface="微軟正黑體"/>
-                <a:ea typeface="微軟正黑體"/>
-                <a:cs typeface="微軟正黑體"/>
-              </a:rPr>
-              <a:t>W15–16 ★</a:t>
-            </a:r>
-          </a:p>
+              <a:rPr sz="1500" b="1">
+                <a:solidFill>
+                  <a:srgbClr val="43A047"/>
+                </a:solidFill>
+                <a:latin typeface="微軟正黑體"/>
+                <a:ea typeface="微軟正黑體"/>
+                <a:cs typeface="微軟正黑體"/>
+              </a:rPr>
+              <a:t>小一範例（根幹花果・根部清楚）</a:t>
+            </a:r>
+          </a:p>
+        </p:txBody>
+      </p:sp>
+      <p:pic>
+        <p:nvPicPr>
+          <p:cNvPr id="7" name="Picture 6" descr="work-08-g1.jpg"/>
+          <p:cNvPicPr>
+            <a:picLocks noChangeAspect="1"/>
+          </p:cNvPicPr>
+          <p:nvPr/>
+        </p:nvPicPr>
+        <p:blipFill>
+          <a:blip r:embed="rId2"/>
+          <a:stretch>
+            <a:fillRect/>
+          </a:stretch>
+        </p:blipFill>
+        <p:spPr>
+          <a:xfrm>
+            <a:off x="514350" y="1828800"/>
+            <a:ext cx="5372100" cy="4297680"/>
+          </a:xfrm>
+          <a:prstGeom prst="rect">
+            <a:avLst/>
+          </a:prstGeom>
+        </p:spPr>
+      </p:pic>
+      <p:sp>
+        <p:nvSpPr>
+          <p:cNvPr id="8" name="Rectangle 7"/>
+          <p:cNvSpPr/>
+          <p:nvPr/>
+        </p:nvSpPr>
+        <p:spPr>
+          <a:xfrm>
+            <a:off x="6217920" y="1143000"/>
+            <a:ext cx="5577840" cy="502920"/>
+          </a:xfrm>
+          <a:prstGeom prst="rect">
+            <a:avLst/>
+          </a:prstGeom>
+          <a:solidFill>
+            <a:srgbClr val="C6E2C7"/>
+          </a:solidFill>
+          <a:ln>
+            <a:noFill/>
+          </a:ln>
+          <a:effectLst/>
+        </p:spPr>
+        <p:style>
+          <a:lnRef idx="1">
+            <a:schemeClr val="accent1"/>
+          </a:lnRef>
+          <a:fillRef idx="3">
+            <a:schemeClr val="accent1"/>
+          </a:fillRef>
+          <a:effectRef idx="2">
+            <a:schemeClr val="accent1"/>
+          </a:effectRef>
+          <a:fontRef idx="minor">
+            <a:schemeClr val="lt1"/>
+          </a:fontRef>
+        </p:style>
+        <p:txBody>
+          <a:bodyPr rtlCol="0" anchor="ctr"/>
+          <a:lstStyle/>
+          <a:p>
+            <a:pPr algn="ctr"/>
+          </a:p>
+        </p:txBody>
+      </p:sp>
+      <p:sp>
+        <p:nvSpPr>
+          <p:cNvPr id="9" name="TextBox 8"/>
+          <p:cNvSpPr txBox="1"/>
+          <p:nvPr/>
+        </p:nvSpPr>
+        <p:spPr>
+          <a:xfrm>
+            <a:off x="6217920" y="1197864"/>
+            <a:ext cx="5577840" cy="411480"/>
+          </a:xfrm>
+          <a:prstGeom prst="rect">
+            <a:avLst/>
+          </a:prstGeom>
+          <a:noFill/>
+        </p:spPr>
+        <p:txBody>
+          <a:bodyPr wrap="square" anchor="ctr" lIns="50800" rIns="50800" tIns="25400" bIns="25400">
+            <a:spAutoFit/>
+          </a:bodyPr>
+          <a:lstStyle/>
           <a:p>
             <a:pPr algn="ctr">
               <a:lnSpc>
-                <a:spcPct val="110000"/>
+                <a:spcPct val="100000"/>
               </a:lnSpc>
               <a:spcAft>
                 <a:spcPts val="600"/>
               </a:spcAft>
             </a:pPr>
             <a:r>
-              <a:rPr sz="1700" b="1">
-                <a:solidFill>
-                  <a:srgbClr val="FFFFFF"/>
-                </a:solidFill>
-                <a:latin typeface="微軟正黑體"/>
-                <a:ea typeface="微軟正黑體"/>
-                <a:cs typeface="微軟正黑體"/>
-              </a:rPr>
-              <a:t>作品8 生命樹＋成果展</a:t>
-            </a:r>
-          </a:p>
-        </p:txBody>
-      </p:sp>
+              <a:rPr sz="1500" b="1">
+                <a:solidFill>
+                  <a:srgbClr val="43A047"/>
+                </a:solidFill>
+                <a:latin typeface="微軟正黑體"/>
+                <a:ea typeface="微軟正黑體"/>
+                <a:cs typeface="微軟正黑體"/>
+              </a:rPr>
+              <a:t>小二範例（樹下加上支撐我的家人）</a:t>
+            </a:r>
+          </a:p>
+        </p:txBody>
+      </p:sp>
+      <p:pic>
+        <p:nvPicPr>
+          <p:cNvPr id="10" name="Picture 9" descr="work-08-g2.jpg"/>
+          <p:cNvPicPr>
+            <a:picLocks noChangeAspect="1"/>
+          </p:cNvPicPr>
+          <p:nvPr/>
+        </p:nvPicPr>
+        <p:blipFill>
+          <a:blip r:embed="rId3"/>
+          <a:stretch>
+            <a:fillRect/>
+          </a:stretch>
+        </p:blipFill>
+        <p:spPr>
+          <a:xfrm>
+            <a:off x="6217920" y="1885950"/>
+            <a:ext cx="5577840" cy="4183380"/>
+          </a:xfrm>
+          <a:prstGeom prst="rect">
+            <a:avLst/>
+          </a:prstGeom>
+        </p:spPr>
+      </p:pic>
     </p:spTree>
   </p:cSld>
   <p:clrMapOvr>
@@ -14293,6 +13646,901 @@
             <a:avLst/>
           </a:prstGeom>
           <a:solidFill>
+            <a:srgbClr val="FFFBF2"/>
+          </a:solidFill>
+          <a:ln>
+            <a:noFill/>
+          </a:ln>
+          <a:effectLst/>
+        </p:spPr>
+        <p:style>
+          <a:lnRef idx="1">
+            <a:schemeClr val="accent1"/>
+          </a:lnRef>
+          <a:fillRef idx="3">
+            <a:schemeClr val="accent1"/>
+          </a:fillRef>
+          <a:effectRef idx="2">
+            <a:schemeClr val="accent1"/>
+          </a:effectRef>
+          <a:fontRef idx="minor">
+            <a:schemeClr val="lt1"/>
+          </a:fontRef>
+        </p:style>
+        <p:txBody>
+          <a:bodyPr rtlCol="0" anchor="ctr"/>
+          <a:lstStyle/>
+          <a:p>
+            <a:pPr algn="ctr"/>
+          </a:p>
+        </p:txBody>
+      </p:sp>
+      <p:sp>
+        <p:nvSpPr>
+          <p:cNvPr id="3" name="Rectangle 2"/>
+          <p:cNvSpPr/>
+          <p:nvPr/>
+        </p:nvSpPr>
+        <p:spPr>
+          <a:xfrm>
+            <a:off x="0" y="0"/>
+            <a:ext cx="12191695" cy="914400"/>
+          </a:xfrm>
+          <a:prstGeom prst="rect">
+            <a:avLst/>
+          </a:prstGeom>
+          <a:solidFill>
+            <a:srgbClr val="E5732B"/>
+          </a:solidFill>
+          <a:ln>
+            <a:noFill/>
+          </a:ln>
+          <a:effectLst/>
+        </p:spPr>
+        <p:style>
+          <a:lnRef idx="1">
+            <a:schemeClr val="accent1"/>
+          </a:lnRef>
+          <a:fillRef idx="3">
+            <a:schemeClr val="accent1"/>
+          </a:fillRef>
+          <a:effectRef idx="2">
+            <a:schemeClr val="accent1"/>
+          </a:effectRef>
+          <a:fontRef idx="minor">
+            <a:schemeClr val="lt1"/>
+          </a:fontRef>
+        </p:style>
+        <p:txBody>
+          <a:bodyPr rtlCol="0" anchor="ctr"/>
+          <a:lstStyle/>
+          <a:p>
+            <a:pPr algn="ctr"/>
+          </a:p>
+        </p:txBody>
+      </p:sp>
+      <p:sp>
+        <p:nvSpPr>
+          <p:cNvPr id="4" name="TextBox 3"/>
+          <p:cNvSpPr txBox="1"/>
+          <p:nvPr/>
+        </p:nvSpPr>
+        <p:spPr>
+          <a:xfrm>
+            <a:off x="548640" y="146304"/>
+            <a:ext cx="10972800" cy="640080"/>
+          </a:xfrm>
+          <a:prstGeom prst="rect">
+            <a:avLst/>
+          </a:prstGeom>
+          <a:noFill/>
+        </p:spPr>
+        <p:txBody>
+          <a:bodyPr wrap="square" anchor="t" lIns="50800" rIns="50800" tIns="25400" bIns="25400">
+            <a:spAutoFit/>
+          </a:bodyPr>
+          <a:lstStyle/>
+          <a:p>
+            <a:pPr algn="l">
+              <a:lnSpc>
+                <a:spcPct val="100000"/>
+              </a:lnSpc>
+              <a:spcAft>
+                <a:spcPts val="600"/>
+              </a:spcAft>
+            </a:pPr>
+            <a:r>
+              <a:rPr sz="2600" b="1">
+                <a:solidFill>
+                  <a:srgbClr val="FFFFFF"/>
+                </a:solidFill>
+                <a:latin typeface="微軟正黑體"/>
+                <a:ea typeface="微軟正黑體"/>
+                <a:cs typeface="微軟正黑體"/>
+              </a:rPr>
+              <a:t>16 週學期行事曆（★=作品需陰乾跨週）</a:t>
+            </a:r>
+          </a:p>
+        </p:txBody>
+      </p:sp>
+      <p:sp>
+        <p:nvSpPr>
+          <p:cNvPr id="5" name="Rectangle 4"/>
+          <p:cNvSpPr/>
+          <p:nvPr/>
+        </p:nvSpPr>
+        <p:spPr>
+          <a:xfrm>
+            <a:off x="640080" y="1417320"/>
+            <a:ext cx="2743200" cy="1737360"/>
+          </a:xfrm>
+          <a:prstGeom prst="rect">
+            <a:avLst/>
+          </a:prstGeom>
+          <a:solidFill>
+            <a:srgbClr val="5A48B0"/>
+          </a:solidFill>
+          <a:ln>
+            <a:noFill/>
+          </a:ln>
+          <a:effectLst/>
+        </p:spPr>
+        <p:style>
+          <a:lnRef idx="1">
+            <a:schemeClr val="accent1"/>
+          </a:lnRef>
+          <a:fillRef idx="3">
+            <a:schemeClr val="accent1"/>
+          </a:fillRef>
+          <a:effectRef idx="2">
+            <a:schemeClr val="accent1"/>
+          </a:effectRef>
+          <a:fontRef idx="minor">
+            <a:schemeClr val="lt1"/>
+          </a:fontRef>
+        </p:style>
+        <p:txBody>
+          <a:bodyPr rtlCol="0" anchor="ctr"/>
+          <a:lstStyle/>
+          <a:p>
+            <a:pPr algn="ctr"/>
+          </a:p>
+        </p:txBody>
+      </p:sp>
+      <p:sp>
+        <p:nvSpPr>
+          <p:cNvPr id="6" name="TextBox 5"/>
+          <p:cNvSpPr txBox="1"/>
+          <p:nvPr/>
+        </p:nvSpPr>
+        <p:spPr>
+          <a:xfrm>
+            <a:off x="777240" y="1600200"/>
+            <a:ext cx="2468880" cy="1371600"/>
+          </a:xfrm>
+          <a:prstGeom prst="rect">
+            <a:avLst/>
+          </a:prstGeom>
+          <a:noFill/>
+        </p:spPr>
+        <p:txBody>
+          <a:bodyPr wrap="square" anchor="ctr" lIns="50800" rIns="50800" tIns="25400" bIns="25400">
+            <a:spAutoFit/>
+          </a:bodyPr>
+          <a:lstStyle/>
+          <a:p>
+            <a:pPr algn="ctr">
+              <a:lnSpc>
+                <a:spcPct val="110000"/>
+              </a:lnSpc>
+              <a:spcAft>
+                <a:spcPts val="600"/>
+              </a:spcAft>
+            </a:pPr>
+            <a:r>
+              <a:rPr sz="2000" b="1">
+                <a:solidFill>
+                  <a:srgbClr val="FFE082"/>
+                </a:solidFill>
+                <a:latin typeface="微軟正黑體"/>
+                <a:ea typeface="微軟正黑體"/>
+                <a:cs typeface="微軟正黑體"/>
+              </a:rPr>
+              <a:t>W1–2</a:t>
+            </a:r>
+          </a:p>
+          <a:p>
+            <a:pPr algn="ctr">
+              <a:lnSpc>
+                <a:spcPct val="110000"/>
+              </a:lnSpc>
+              <a:spcAft>
+                <a:spcPts val="600"/>
+              </a:spcAft>
+            </a:pPr>
+            <a:r>
+              <a:rPr sz="1700" b="1">
+                <a:solidFill>
+                  <a:srgbClr val="FFFFFF"/>
+                </a:solidFill>
+                <a:latin typeface="微軟正黑體"/>
+                <a:ea typeface="微軟正黑體"/>
+                <a:cs typeface="微軟正黑體"/>
+              </a:rPr>
+              <a:t>作品1 魔法小宇宙</a:t>
+            </a:r>
+          </a:p>
+        </p:txBody>
+      </p:sp>
+      <p:sp>
+        <p:nvSpPr>
+          <p:cNvPr id="7" name="Rectangle 6"/>
+          <p:cNvSpPr/>
+          <p:nvPr/>
+        </p:nvSpPr>
+        <p:spPr>
+          <a:xfrm>
+            <a:off x="3547872" y="1417320"/>
+            <a:ext cx="2743200" cy="1737360"/>
+          </a:xfrm>
+          <a:prstGeom prst="rect">
+            <a:avLst/>
+          </a:prstGeom>
+          <a:solidFill>
+            <a:srgbClr val="7CB342"/>
+          </a:solidFill>
+          <a:ln>
+            <a:noFill/>
+          </a:ln>
+          <a:effectLst/>
+        </p:spPr>
+        <p:style>
+          <a:lnRef idx="1">
+            <a:schemeClr val="accent1"/>
+          </a:lnRef>
+          <a:fillRef idx="3">
+            <a:schemeClr val="accent1"/>
+          </a:fillRef>
+          <a:effectRef idx="2">
+            <a:schemeClr val="accent1"/>
+          </a:effectRef>
+          <a:fontRef idx="minor">
+            <a:schemeClr val="lt1"/>
+          </a:fontRef>
+        </p:style>
+        <p:txBody>
+          <a:bodyPr rtlCol="0" anchor="ctr"/>
+          <a:lstStyle/>
+          <a:p>
+            <a:pPr algn="ctr"/>
+          </a:p>
+        </p:txBody>
+      </p:sp>
+      <p:sp>
+        <p:nvSpPr>
+          <p:cNvPr id="8" name="TextBox 7"/>
+          <p:cNvSpPr txBox="1"/>
+          <p:nvPr/>
+        </p:nvSpPr>
+        <p:spPr>
+          <a:xfrm>
+            <a:off x="3685032" y="1600200"/>
+            <a:ext cx="2468880" cy="1371600"/>
+          </a:xfrm>
+          <a:prstGeom prst="rect">
+            <a:avLst/>
+          </a:prstGeom>
+          <a:noFill/>
+        </p:spPr>
+        <p:txBody>
+          <a:bodyPr wrap="square" anchor="ctr" lIns="50800" rIns="50800" tIns="25400" bIns="25400">
+            <a:spAutoFit/>
+          </a:bodyPr>
+          <a:lstStyle/>
+          <a:p>
+            <a:pPr algn="ctr">
+              <a:lnSpc>
+                <a:spcPct val="110000"/>
+              </a:lnSpc>
+              <a:spcAft>
+                <a:spcPts val="600"/>
+              </a:spcAft>
+            </a:pPr>
+            <a:r>
+              <a:rPr sz="2000" b="1">
+                <a:solidFill>
+                  <a:srgbClr val="FFE082"/>
+                </a:solidFill>
+                <a:latin typeface="微軟正黑體"/>
+                <a:ea typeface="微軟正黑體"/>
+                <a:cs typeface="微軟正黑體"/>
+              </a:rPr>
+              <a:t>W3–4 ★</a:t>
+            </a:r>
+          </a:p>
+          <a:p>
+            <a:pPr algn="ctr">
+              <a:lnSpc>
+                <a:spcPct val="110000"/>
+              </a:lnSpc>
+              <a:spcAft>
+                <a:spcPts val="600"/>
+              </a:spcAft>
+            </a:pPr>
+            <a:r>
+              <a:rPr sz="1700" b="1">
+                <a:solidFill>
+                  <a:srgbClr val="FFFFFF"/>
+                </a:solidFill>
+                <a:latin typeface="微軟正黑體"/>
+                <a:ea typeface="微軟正黑體"/>
+                <a:cs typeface="微軟正黑體"/>
+              </a:rPr>
+              <a:t>作品2 種子寶寶的家</a:t>
+            </a:r>
+          </a:p>
+        </p:txBody>
+      </p:sp>
+      <p:sp>
+        <p:nvSpPr>
+          <p:cNvPr id="9" name="Rectangle 8"/>
+          <p:cNvSpPr/>
+          <p:nvPr/>
+        </p:nvSpPr>
+        <p:spPr>
+          <a:xfrm>
+            <a:off x="6455664" y="1417320"/>
+            <a:ext cx="2743200" cy="1737360"/>
+          </a:xfrm>
+          <a:prstGeom prst="rect">
+            <a:avLst/>
+          </a:prstGeom>
+          <a:solidFill>
+            <a:srgbClr val="42A5F5"/>
+          </a:solidFill>
+          <a:ln>
+            <a:noFill/>
+          </a:ln>
+          <a:effectLst/>
+        </p:spPr>
+        <p:style>
+          <a:lnRef idx="1">
+            <a:schemeClr val="accent1"/>
+          </a:lnRef>
+          <a:fillRef idx="3">
+            <a:schemeClr val="accent1"/>
+          </a:fillRef>
+          <a:effectRef idx="2">
+            <a:schemeClr val="accent1"/>
+          </a:effectRef>
+          <a:fontRef idx="minor">
+            <a:schemeClr val="lt1"/>
+          </a:fontRef>
+        </p:style>
+        <p:txBody>
+          <a:bodyPr rtlCol="0" anchor="ctr"/>
+          <a:lstStyle/>
+          <a:p>
+            <a:pPr algn="ctr"/>
+          </a:p>
+        </p:txBody>
+      </p:sp>
+      <p:sp>
+        <p:nvSpPr>
+          <p:cNvPr id="10" name="TextBox 9"/>
+          <p:cNvSpPr txBox="1"/>
+          <p:nvPr/>
+        </p:nvSpPr>
+        <p:spPr>
+          <a:xfrm>
+            <a:off x="6592824" y="1600200"/>
+            <a:ext cx="2468880" cy="1371600"/>
+          </a:xfrm>
+          <a:prstGeom prst="rect">
+            <a:avLst/>
+          </a:prstGeom>
+          <a:noFill/>
+        </p:spPr>
+        <p:txBody>
+          <a:bodyPr wrap="square" anchor="ctr" lIns="50800" rIns="50800" tIns="25400" bIns="25400">
+            <a:spAutoFit/>
+          </a:bodyPr>
+          <a:lstStyle/>
+          <a:p>
+            <a:pPr algn="ctr">
+              <a:lnSpc>
+                <a:spcPct val="110000"/>
+              </a:lnSpc>
+              <a:spcAft>
+                <a:spcPts val="600"/>
+              </a:spcAft>
+            </a:pPr>
+            <a:r>
+              <a:rPr sz="2000" b="1">
+                <a:solidFill>
+                  <a:srgbClr val="FFE082"/>
+                </a:solidFill>
+                <a:latin typeface="微軟正黑體"/>
+                <a:ea typeface="微軟正黑體"/>
+                <a:cs typeface="微軟正黑體"/>
+              </a:rPr>
+              <a:t>W5–6</a:t>
+            </a:r>
+          </a:p>
+          <a:p>
+            <a:pPr algn="ctr">
+              <a:lnSpc>
+                <a:spcPct val="110000"/>
+              </a:lnSpc>
+              <a:spcAft>
+                <a:spcPts val="600"/>
+              </a:spcAft>
+            </a:pPr>
+            <a:r>
+              <a:rPr sz="1700" b="1">
+                <a:solidFill>
+                  <a:srgbClr val="FFFFFF"/>
+                </a:solidFill>
+                <a:latin typeface="微軟正黑體"/>
+                <a:ea typeface="微軟正黑體"/>
+                <a:cs typeface="微軟正黑體"/>
+              </a:rPr>
+              <a:t>作品3 手牽手好朋友</a:t>
+            </a:r>
+          </a:p>
+        </p:txBody>
+      </p:sp>
+      <p:sp>
+        <p:nvSpPr>
+          <p:cNvPr id="11" name="Rectangle 10"/>
+          <p:cNvSpPr/>
+          <p:nvPr/>
+        </p:nvSpPr>
+        <p:spPr>
+          <a:xfrm>
+            <a:off x="9363456" y="1417320"/>
+            <a:ext cx="2743200" cy="1737360"/>
+          </a:xfrm>
+          <a:prstGeom prst="rect">
+            <a:avLst/>
+          </a:prstGeom>
+          <a:solidFill>
+            <a:srgbClr val="EF7043"/>
+          </a:solidFill>
+          <a:ln>
+            <a:noFill/>
+          </a:ln>
+          <a:effectLst/>
+        </p:spPr>
+        <p:style>
+          <a:lnRef idx="1">
+            <a:schemeClr val="accent1"/>
+          </a:lnRef>
+          <a:fillRef idx="3">
+            <a:schemeClr val="accent1"/>
+          </a:fillRef>
+          <a:effectRef idx="2">
+            <a:schemeClr val="accent1"/>
+          </a:effectRef>
+          <a:fontRef idx="minor">
+            <a:schemeClr val="lt1"/>
+          </a:fontRef>
+        </p:style>
+        <p:txBody>
+          <a:bodyPr rtlCol="0" anchor="ctr"/>
+          <a:lstStyle/>
+          <a:p>
+            <a:pPr algn="ctr"/>
+          </a:p>
+        </p:txBody>
+      </p:sp>
+      <p:sp>
+        <p:nvSpPr>
+          <p:cNvPr id="12" name="TextBox 11"/>
+          <p:cNvSpPr txBox="1"/>
+          <p:nvPr/>
+        </p:nvSpPr>
+        <p:spPr>
+          <a:xfrm>
+            <a:off x="9500616" y="1600200"/>
+            <a:ext cx="2468880" cy="1371600"/>
+          </a:xfrm>
+          <a:prstGeom prst="rect">
+            <a:avLst/>
+          </a:prstGeom>
+          <a:noFill/>
+        </p:spPr>
+        <p:txBody>
+          <a:bodyPr wrap="square" anchor="ctr" lIns="50800" rIns="50800" tIns="25400" bIns="25400">
+            <a:spAutoFit/>
+          </a:bodyPr>
+          <a:lstStyle/>
+          <a:p>
+            <a:pPr algn="ctr">
+              <a:lnSpc>
+                <a:spcPct val="110000"/>
+              </a:lnSpc>
+              <a:spcAft>
+                <a:spcPts val="600"/>
+              </a:spcAft>
+            </a:pPr>
+            <a:r>
+              <a:rPr sz="2000" b="1">
+                <a:solidFill>
+                  <a:srgbClr val="FFE082"/>
+                </a:solidFill>
+                <a:latin typeface="微軟正黑體"/>
+                <a:ea typeface="微軟正黑體"/>
+                <a:cs typeface="微軟正黑體"/>
+              </a:rPr>
+              <a:t>W7–8 ★</a:t>
+            </a:r>
+          </a:p>
+          <a:p>
+            <a:pPr algn="ctr">
+              <a:lnSpc>
+                <a:spcPct val="110000"/>
+              </a:lnSpc>
+              <a:spcAft>
+                <a:spcPts val="600"/>
+              </a:spcAft>
+            </a:pPr>
+            <a:r>
+              <a:rPr sz="1700" b="1">
+                <a:solidFill>
+                  <a:srgbClr val="FFFFFF"/>
+                </a:solidFill>
+                <a:latin typeface="微軟正黑體"/>
+                <a:ea typeface="微軟正黑體"/>
+                <a:cs typeface="微軟正黑體"/>
+              </a:rPr>
+              <a:t>作品4 溫暖小屋</a:t>
+            </a:r>
+          </a:p>
+        </p:txBody>
+      </p:sp>
+      <p:sp>
+        <p:nvSpPr>
+          <p:cNvPr id="13" name="Rectangle 12"/>
+          <p:cNvSpPr/>
+          <p:nvPr/>
+        </p:nvSpPr>
+        <p:spPr>
+          <a:xfrm>
+            <a:off x="640080" y="3383280"/>
+            <a:ext cx="2743200" cy="1737360"/>
+          </a:xfrm>
+          <a:prstGeom prst="rect">
+            <a:avLst/>
+          </a:prstGeom>
+          <a:solidFill>
+            <a:srgbClr val="AB7DF0"/>
+          </a:solidFill>
+          <a:ln>
+            <a:noFill/>
+          </a:ln>
+          <a:effectLst/>
+        </p:spPr>
+        <p:style>
+          <a:lnRef idx="1">
+            <a:schemeClr val="accent1"/>
+          </a:lnRef>
+          <a:fillRef idx="3">
+            <a:schemeClr val="accent1"/>
+          </a:fillRef>
+          <a:effectRef idx="2">
+            <a:schemeClr val="accent1"/>
+          </a:effectRef>
+          <a:fontRef idx="minor">
+            <a:schemeClr val="lt1"/>
+          </a:fontRef>
+        </p:style>
+        <p:txBody>
+          <a:bodyPr rtlCol="0" anchor="ctr"/>
+          <a:lstStyle/>
+          <a:p>
+            <a:pPr algn="ctr"/>
+          </a:p>
+        </p:txBody>
+      </p:sp>
+      <p:sp>
+        <p:nvSpPr>
+          <p:cNvPr id="14" name="TextBox 13"/>
+          <p:cNvSpPr txBox="1"/>
+          <p:nvPr/>
+        </p:nvSpPr>
+        <p:spPr>
+          <a:xfrm>
+            <a:off x="777240" y="3566160"/>
+            <a:ext cx="2468880" cy="1371600"/>
+          </a:xfrm>
+          <a:prstGeom prst="rect">
+            <a:avLst/>
+          </a:prstGeom>
+          <a:noFill/>
+        </p:spPr>
+        <p:txBody>
+          <a:bodyPr wrap="square" anchor="ctr" lIns="50800" rIns="50800" tIns="25400" bIns="25400">
+            <a:spAutoFit/>
+          </a:bodyPr>
+          <a:lstStyle/>
+          <a:p>
+            <a:pPr algn="ctr">
+              <a:lnSpc>
+                <a:spcPct val="110000"/>
+              </a:lnSpc>
+              <a:spcAft>
+                <a:spcPts val="600"/>
+              </a:spcAft>
+            </a:pPr>
+            <a:r>
+              <a:rPr sz="2000" b="1">
+                <a:solidFill>
+                  <a:srgbClr val="FFE082"/>
+                </a:solidFill>
+                <a:latin typeface="微軟正黑體"/>
+                <a:ea typeface="微軟正黑體"/>
+                <a:cs typeface="微軟正黑體"/>
+              </a:rPr>
+              <a:t>W9–10</a:t>
+            </a:r>
+          </a:p>
+          <a:p>
+            <a:pPr algn="ctr">
+              <a:lnSpc>
+                <a:spcPct val="110000"/>
+              </a:lnSpc>
+              <a:spcAft>
+                <a:spcPts val="600"/>
+              </a:spcAft>
+            </a:pPr>
+            <a:r>
+              <a:rPr sz="1700" b="1">
+                <a:solidFill>
+                  <a:srgbClr val="FFFFFF"/>
+                </a:solidFill>
+                <a:latin typeface="微軟正黑體"/>
+                <a:ea typeface="微軟正黑體"/>
+                <a:cs typeface="微軟正黑體"/>
+              </a:rPr>
+              <a:t>作品5 大自然書籤</a:t>
+            </a:r>
+          </a:p>
+        </p:txBody>
+      </p:sp>
+      <p:sp>
+        <p:nvSpPr>
+          <p:cNvPr id="15" name="Rectangle 14"/>
+          <p:cNvSpPr/>
+          <p:nvPr/>
+        </p:nvSpPr>
+        <p:spPr>
+          <a:xfrm>
+            <a:off x="3547872" y="3383280"/>
+            <a:ext cx="2743200" cy="1737360"/>
+          </a:xfrm>
+          <a:prstGeom prst="rect">
+            <a:avLst/>
+          </a:prstGeom>
+          <a:solidFill>
+            <a:srgbClr val="039BE5"/>
+          </a:solidFill>
+          <a:ln>
+            <a:noFill/>
+          </a:ln>
+          <a:effectLst/>
+        </p:spPr>
+        <p:style>
+          <a:lnRef idx="1">
+            <a:schemeClr val="accent1"/>
+          </a:lnRef>
+          <a:fillRef idx="3">
+            <a:schemeClr val="accent1"/>
+          </a:fillRef>
+          <a:effectRef idx="2">
+            <a:schemeClr val="accent1"/>
+          </a:effectRef>
+          <a:fontRef idx="minor">
+            <a:schemeClr val="lt1"/>
+          </a:fontRef>
+        </p:style>
+        <p:txBody>
+          <a:bodyPr rtlCol="0" anchor="ctr"/>
+          <a:lstStyle/>
+          <a:p>
+            <a:pPr algn="ctr"/>
+          </a:p>
+        </p:txBody>
+      </p:sp>
+      <p:sp>
+        <p:nvSpPr>
+          <p:cNvPr id="16" name="TextBox 15"/>
+          <p:cNvSpPr txBox="1"/>
+          <p:nvPr/>
+        </p:nvSpPr>
+        <p:spPr>
+          <a:xfrm>
+            <a:off x="3685032" y="3566160"/>
+            <a:ext cx="2468880" cy="1371600"/>
+          </a:xfrm>
+          <a:prstGeom prst="rect">
+            <a:avLst/>
+          </a:prstGeom>
+          <a:noFill/>
+        </p:spPr>
+        <p:txBody>
+          <a:bodyPr wrap="square" anchor="ctr" lIns="50800" rIns="50800" tIns="25400" bIns="25400">
+            <a:spAutoFit/>
+          </a:bodyPr>
+          <a:lstStyle/>
+          <a:p>
+            <a:pPr algn="ctr">
+              <a:lnSpc>
+                <a:spcPct val="110000"/>
+              </a:lnSpc>
+              <a:spcAft>
+                <a:spcPts val="600"/>
+              </a:spcAft>
+            </a:pPr>
+            <a:r>
+              <a:rPr sz="2000" b="1">
+                <a:solidFill>
+                  <a:srgbClr val="FFE082"/>
+                </a:solidFill>
+                <a:latin typeface="微軟正黑體"/>
+                <a:ea typeface="微軟正黑體"/>
+                <a:cs typeface="微軟正黑體"/>
+              </a:rPr>
+              <a:t>W11–12 ★</a:t>
+            </a:r>
+          </a:p>
+          <a:p>
+            <a:pPr algn="ctr">
+              <a:lnSpc>
+                <a:spcPct val="110000"/>
+              </a:lnSpc>
+              <a:spcAft>
+                <a:spcPts val="600"/>
+              </a:spcAft>
+            </a:pPr>
+            <a:r>
+              <a:rPr sz="1700" b="1">
+                <a:solidFill>
+                  <a:srgbClr val="FFFFFF"/>
+                </a:solidFill>
+                <a:latin typeface="微軟正黑體"/>
+                <a:ea typeface="微軟正黑體"/>
+                <a:cs typeface="微軟正黑體"/>
+              </a:rPr>
+              <a:t>作品6 海底好朋友</a:t>
+            </a:r>
+          </a:p>
+        </p:txBody>
+      </p:sp>
+      <p:sp>
+        <p:nvSpPr>
+          <p:cNvPr id="17" name="Rectangle 16"/>
+          <p:cNvSpPr/>
+          <p:nvPr/>
+        </p:nvSpPr>
+        <p:spPr>
+          <a:xfrm>
+            <a:off x="6455664" y="3383280"/>
+            <a:ext cx="2743200" cy="1737360"/>
+          </a:xfrm>
+          <a:prstGeom prst="rect">
+            <a:avLst/>
+          </a:prstGeom>
+          <a:solidFill>
+            <a:srgbClr val="EC6FA0"/>
+          </a:solidFill>
+          <a:ln>
+            <a:noFill/>
+          </a:ln>
+          <a:effectLst/>
+        </p:spPr>
+        <p:style>
+          <a:lnRef idx="1">
+            <a:schemeClr val="accent1"/>
+          </a:lnRef>
+          <a:fillRef idx="3">
+            <a:schemeClr val="accent1"/>
+          </a:fillRef>
+          <a:effectRef idx="2">
+            <a:schemeClr val="accent1"/>
+          </a:effectRef>
+          <a:fontRef idx="minor">
+            <a:schemeClr val="lt1"/>
+          </a:fontRef>
+        </p:style>
+        <p:txBody>
+          <a:bodyPr rtlCol="0" anchor="ctr"/>
+          <a:lstStyle/>
+          <a:p>
+            <a:pPr algn="ctr"/>
+          </a:p>
+        </p:txBody>
+      </p:sp>
+      <p:sp>
+        <p:nvSpPr>
+          <p:cNvPr id="18" name="TextBox 17"/>
+          <p:cNvSpPr txBox="1"/>
+          <p:nvPr/>
+        </p:nvSpPr>
+        <p:spPr>
+          <a:xfrm>
+            <a:off x="6592824" y="3566160"/>
+            <a:ext cx="2468880" cy="1371600"/>
+          </a:xfrm>
+          <a:prstGeom prst="rect">
+            <a:avLst/>
+          </a:prstGeom>
+          <a:noFill/>
+        </p:spPr>
+        <p:txBody>
+          <a:bodyPr wrap="square" anchor="ctr" lIns="50800" rIns="50800" tIns="25400" bIns="25400">
+            <a:spAutoFit/>
+          </a:bodyPr>
+          <a:lstStyle/>
+          <a:p>
+            <a:pPr algn="ctr">
+              <a:lnSpc>
+                <a:spcPct val="110000"/>
+              </a:lnSpc>
+              <a:spcAft>
+                <a:spcPts val="600"/>
+              </a:spcAft>
+            </a:pPr>
+            <a:r>
+              <a:rPr sz="2000" b="1">
+                <a:solidFill>
+                  <a:srgbClr val="FFE082"/>
+                </a:solidFill>
+                <a:latin typeface="微軟正黑體"/>
+                <a:ea typeface="微軟正黑體"/>
+                <a:cs typeface="微軟正黑體"/>
+              </a:rPr>
+              <a:t>W13–14</a:t>
+            </a:r>
+          </a:p>
+          <a:p>
+            <a:pPr algn="ctr">
+              <a:lnSpc>
+                <a:spcPct val="110000"/>
+              </a:lnSpc>
+              <a:spcAft>
+                <a:spcPts val="600"/>
+              </a:spcAft>
+            </a:pPr>
+            <a:r>
+              <a:rPr sz="1700" b="1">
+                <a:solidFill>
+                  <a:srgbClr val="FFFFFF"/>
+                </a:solidFill>
+                <a:latin typeface="微軟正黑體"/>
+                <a:ea typeface="微軟正黑體"/>
+                <a:cs typeface="微軟正黑體"/>
+              </a:rPr>
+              <a:t>作品7 毛毛蟲變蝴蝶</a:t>
+            </a:r>
+          </a:p>
+        </p:txBody>
+      </p:sp>
+      <p:sp>
+        <p:nvSpPr>
+          <p:cNvPr id="19" name="Rectangle 18"/>
+          <p:cNvSpPr/>
+          <p:nvPr/>
+        </p:nvSpPr>
+        <p:spPr>
+          <a:xfrm>
+            <a:off x="9363456" y="3383280"/>
+            <a:ext cx="2743200" cy="1737360"/>
+          </a:xfrm>
+          <a:prstGeom prst="rect">
+            <a:avLst/>
+          </a:prstGeom>
+          <a:solidFill>
             <a:srgbClr val="43A047"/>
           </a:solidFill>
           <a:ln>
@@ -14324,102 +14572,14 @@
       </p:sp>
       <p:sp>
         <p:nvSpPr>
-          <p:cNvPr id="3" name="Rectangle 2"/>
-          <p:cNvSpPr/>
-          <p:nvPr/>
-        </p:nvSpPr>
-        <p:spPr>
-          <a:xfrm>
-            <a:off x="0" y="0"/>
-            <a:ext cx="12191695" cy="320040"/>
-          </a:xfrm>
-          <a:prstGeom prst="rect">
-            <a:avLst/>
-          </a:prstGeom>
-          <a:solidFill>
-            <a:srgbClr val="FFCA28"/>
-          </a:solidFill>
-          <a:ln>
-            <a:noFill/>
-          </a:ln>
-          <a:effectLst/>
-        </p:spPr>
-        <p:style>
-          <a:lnRef idx="1">
-            <a:schemeClr val="accent1"/>
-          </a:lnRef>
-          <a:fillRef idx="3">
-            <a:schemeClr val="accent1"/>
-          </a:fillRef>
-          <a:effectRef idx="2">
-            <a:schemeClr val="accent1"/>
-          </a:effectRef>
-          <a:fontRef idx="minor">
-            <a:schemeClr val="lt1"/>
-          </a:fontRef>
-        </p:style>
-        <p:txBody>
-          <a:bodyPr rtlCol="0" anchor="ctr"/>
-          <a:lstStyle/>
-          <a:p>
-            <a:pPr algn="ctr"/>
-          </a:p>
-        </p:txBody>
-      </p:sp>
-      <p:sp>
-        <p:nvSpPr>
-          <p:cNvPr id="4" name="Rectangle 3"/>
-          <p:cNvSpPr/>
-          <p:nvPr/>
-        </p:nvSpPr>
-        <p:spPr>
-          <a:xfrm>
-            <a:off x="0" y="6537960"/>
-            <a:ext cx="12191695" cy="320040"/>
-          </a:xfrm>
-          <a:prstGeom prst="rect">
-            <a:avLst/>
-          </a:prstGeom>
-          <a:solidFill>
-            <a:srgbClr val="FFCA28"/>
-          </a:solidFill>
-          <a:ln>
-            <a:noFill/>
-          </a:ln>
-          <a:effectLst/>
-        </p:spPr>
-        <p:style>
-          <a:lnRef idx="1">
-            <a:schemeClr val="accent1"/>
-          </a:lnRef>
-          <a:fillRef idx="3">
-            <a:schemeClr val="accent1"/>
-          </a:fillRef>
-          <a:effectRef idx="2">
-            <a:schemeClr val="accent1"/>
-          </a:effectRef>
-          <a:fontRef idx="minor">
-            <a:schemeClr val="lt1"/>
-          </a:fontRef>
-        </p:style>
-        <p:txBody>
-          <a:bodyPr rtlCol="0" anchor="ctr"/>
-          <a:lstStyle/>
-          <a:p>
-            <a:pPr algn="ctr"/>
-          </a:p>
-        </p:txBody>
-      </p:sp>
-      <p:sp>
-        <p:nvSpPr>
-          <p:cNvPr id="5" name="TextBox 4"/>
+          <p:cNvPr id="20" name="TextBox 19"/>
           <p:cNvSpPr txBox="1"/>
           <p:nvPr/>
         </p:nvSpPr>
         <p:spPr>
           <a:xfrm>
-            <a:off x="914400" y="2194560"/>
-            <a:ext cx="10332720" cy="2560320"/>
+            <a:off x="9500616" y="3566160"/>
+            <a:ext cx="2468880" cy="1371600"/>
           </a:xfrm>
           <a:prstGeom prst="rect">
             <a:avLst/>
@@ -14427,21 +14587,42 @@
           <a:noFill/>
         </p:spPr>
         <p:txBody>
-          <a:bodyPr wrap="square" anchor="t" lIns="50800" rIns="50800" tIns="25400" bIns="25400">
+          <a:bodyPr wrap="square" anchor="ctr" lIns="50800" rIns="50800" tIns="25400" bIns="25400">
             <a:spAutoFit/>
           </a:bodyPr>
           <a:lstStyle/>
           <a:p>
             <a:pPr algn="ctr">
               <a:lnSpc>
-                <a:spcPct val="115000"/>
-              </a:lnSpc>
-              <a:spcAft>
-                <a:spcPts val="1200"/>
-              </a:spcAft>
-            </a:pPr>
-            <a:r>
-              <a:rPr sz="4000" b="1">
+                <a:spcPct val="110000"/>
+              </a:lnSpc>
+              <a:spcAft>
+                <a:spcPts val="600"/>
+              </a:spcAft>
+            </a:pPr>
+            <a:r>
+              <a:rPr sz="2000" b="1">
+                <a:solidFill>
+                  <a:srgbClr val="FFE082"/>
+                </a:solidFill>
+                <a:latin typeface="微軟正黑體"/>
+                <a:ea typeface="微軟正黑體"/>
+                <a:cs typeface="微軟正黑體"/>
+              </a:rPr>
+              <a:t>W15–16 ★</a:t>
+            </a:r>
+          </a:p>
+          <a:p>
+            <a:pPr algn="ctr">
+              <a:lnSpc>
+                <a:spcPct val="110000"/>
+              </a:lnSpc>
+              <a:spcAft>
+                <a:spcPts val="600"/>
+              </a:spcAft>
+            </a:pPr>
+            <a:r>
+              <a:rPr sz="1700" b="1">
                 <a:solidFill>
                   <a:srgbClr val="FFFFFF"/>
                 </a:solidFill>
@@ -14449,70 +14630,7 @@
                 <a:ea typeface="微軟正黑體"/>
                 <a:cs typeface="微軟正黑體"/>
               </a:rPr>
-              <a:t>🌻 我們的約定</a:t>
-            </a:r>
-          </a:p>
-          <a:p>
-            <a:pPr algn="ctr">
-              <a:lnSpc>
-                <a:spcPct val="115000"/>
-              </a:lnSpc>
-              <a:spcAft>
-                <a:spcPts val="1200"/>
-              </a:spcAft>
-            </a:pPr>
-            <a:r>
-              <a:rPr sz="2400" b="0">
-                <a:solidFill>
-                  <a:srgbClr val="EAFBEA"/>
-                </a:solidFill>
-                <a:latin typeface="微軟正黑體"/>
-                <a:ea typeface="微軟正黑體"/>
-                <a:cs typeface="微軟正黑體"/>
-              </a:rPr>
-              <a:t>這 16 週，孩子不只帶走 8 件作品，</a:t>
-            </a:r>
-          </a:p>
-          <a:p>
-            <a:pPr algn="ctr">
-              <a:lnSpc>
-                <a:spcPct val="115000"/>
-              </a:lnSpc>
-              <a:spcAft>
-                <a:spcPts val="1200"/>
-              </a:spcAft>
-            </a:pPr>
-            <a:r>
-              <a:rPr sz="2400" b="0">
-                <a:solidFill>
-                  <a:srgbClr val="EAFBEA"/>
-                </a:solidFill>
-                <a:latin typeface="微軟正黑體"/>
-                <a:ea typeface="微軟正黑體"/>
-                <a:cs typeface="微軟正黑體"/>
-              </a:rPr>
-              <a:t>更帶走一座「屬於自己的生命花園」——</a:t>
-            </a:r>
-          </a:p>
-          <a:p>
-            <a:pPr algn="ctr">
-              <a:lnSpc>
-                <a:spcPct val="115000"/>
-              </a:lnSpc>
-              <a:spcAft>
-                <a:spcPts val="1200"/>
-              </a:spcAft>
-            </a:pPr>
-            <a:r>
-              <a:rPr sz="2400" b="1">
-                <a:solidFill>
-                  <a:srgbClr val="FFF9C4"/>
-                </a:solidFill>
-                <a:latin typeface="微軟正黑體"/>
-                <a:ea typeface="微軟正黑體"/>
-                <a:cs typeface="微軟正黑體"/>
-              </a:rPr>
-              <a:t>知道自己有光、會長大、被愛著，也能去愛人與這個世界。</a:t>
+              <a:t>作品8 生命樹＋成果展</a:t>
             </a:r>
           </a:p>
         </p:txBody>
@@ -15619,6 +15737,263 @@
                 <a:cs typeface="微軟正黑體"/>
               </a:rPr>
               <a:t>作品 7、8　成長・夢想</a:t>
+            </a:r>
+          </a:p>
+        </p:txBody>
+      </p:sp>
+    </p:spTree>
+  </p:cSld>
+  <p:clrMapOvr>
+    <a:masterClrMapping/>
+  </p:clrMapOvr>
+</p:sld>
+</file>
+
+<file path=ppt/slides/slide30.xml><?xml version="1.0" encoding="utf-8"?>
+<p:sld xmlns:a="http://schemas.openxmlformats.org/drawingml/2006/main" xmlns:p="http://schemas.openxmlformats.org/presentationml/2006/main" xmlns:r="http://schemas.openxmlformats.org/officeDocument/2006/relationships">
+  <p:cSld>
+    <p:spTree>
+      <p:nvGrpSpPr>
+        <p:cNvPr id="1" name=""/>
+        <p:cNvGrpSpPr/>
+        <p:nvPr/>
+      </p:nvGrpSpPr>
+      <p:grpSpPr/>
+      <p:sp>
+        <p:nvSpPr>
+          <p:cNvPr id="2" name="Rectangle 1"/>
+          <p:cNvSpPr/>
+          <p:nvPr/>
+        </p:nvSpPr>
+        <p:spPr>
+          <a:xfrm>
+            <a:off x="0" y="0"/>
+            <a:ext cx="12191695" cy="6858000"/>
+          </a:xfrm>
+          <a:prstGeom prst="rect">
+            <a:avLst/>
+          </a:prstGeom>
+          <a:solidFill>
+            <a:srgbClr val="43A047"/>
+          </a:solidFill>
+          <a:ln>
+            <a:noFill/>
+          </a:ln>
+          <a:effectLst/>
+        </p:spPr>
+        <p:style>
+          <a:lnRef idx="1">
+            <a:schemeClr val="accent1"/>
+          </a:lnRef>
+          <a:fillRef idx="3">
+            <a:schemeClr val="accent1"/>
+          </a:fillRef>
+          <a:effectRef idx="2">
+            <a:schemeClr val="accent1"/>
+          </a:effectRef>
+          <a:fontRef idx="minor">
+            <a:schemeClr val="lt1"/>
+          </a:fontRef>
+        </p:style>
+        <p:txBody>
+          <a:bodyPr rtlCol="0" anchor="ctr"/>
+          <a:lstStyle/>
+          <a:p>
+            <a:pPr algn="ctr"/>
+          </a:p>
+        </p:txBody>
+      </p:sp>
+      <p:sp>
+        <p:nvSpPr>
+          <p:cNvPr id="3" name="Rectangle 2"/>
+          <p:cNvSpPr/>
+          <p:nvPr/>
+        </p:nvSpPr>
+        <p:spPr>
+          <a:xfrm>
+            <a:off x="0" y="0"/>
+            <a:ext cx="12191695" cy="320040"/>
+          </a:xfrm>
+          <a:prstGeom prst="rect">
+            <a:avLst/>
+          </a:prstGeom>
+          <a:solidFill>
+            <a:srgbClr val="FFCA28"/>
+          </a:solidFill>
+          <a:ln>
+            <a:noFill/>
+          </a:ln>
+          <a:effectLst/>
+        </p:spPr>
+        <p:style>
+          <a:lnRef idx="1">
+            <a:schemeClr val="accent1"/>
+          </a:lnRef>
+          <a:fillRef idx="3">
+            <a:schemeClr val="accent1"/>
+          </a:fillRef>
+          <a:effectRef idx="2">
+            <a:schemeClr val="accent1"/>
+          </a:effectRef>
+          <a:fontRef idx="minor">
+            <a:schemeClr val="lt1"/>
+          </a:fontRef>
+        </p:style>
+        <p:txBody>
+          <a:bodyPr rtlCol="0" anchor="ctr"/>
+          <a:lstStyle/>
+          <a:p>
+            <a:pPr algn="ctr"/>
+          </a:p>
+        </p:txBody>
+      </p:sp>
+      <p:sp>
+        <p:nvSpPr>
+          <p:cNvPr id="4" name="Rectangle 3"/>
+          <p:cNvSpPr/>
+          <p:nvPr/>
+        </p:nvSpPr>
+        <p:spPr>
+          <a:xfrm>
+            <a:off x="0" y="6537960"/>
+            <a:ext cx="12191695" cy="320040"/>
+          </a:xfrm>
+          <a:prstGeom prst="rect">
+            <a:avLst/>
+          </a:prstGeom>
+          <a:solidFill>
+            <a:srgbClr val="FFCA28"/>
+          </a:solidFill>
+          <a:ln>
+            <a:noFill/>
+          </a:ln>
+          <a:effectLst/>
+        </p:spPr>
+        <p:style>
+          <a:lnRef idx="1">
+            <a:schemeClr val="accent1"/>
+          </a:lnRef>
+          <a:fillRef idx="3">
+            <a:schemeClr val="accent1"/>
+          </a:fillRef>
+          <a:effectRef idx="2">
+            <a:schemeClr val="accent1"/>
+          </a:effectRef>
+          <a:fontRef idx="minor">
+            <a:schemeClr val="lt1"/>
+          </a:fontRef>
+        </p:style>
+        <p:txBody>
+          <a:bodyPr rtlCol="0" anchor="ctr"/>
+          <a:lstStyle/>
+          <a:p>
+            <a:pPr algn="ctr"/>
+          </a:p>
+        </p:txBody>
+      </p:sp>
+      <p:sp>
+        <p:nvSpPr>
+          <p:cNvPr id="5" name="TextBox 4"/>
+          <p:cNvSpPr txBox="1"/>
+          <p:nvPr/>
+        </p:nvSpPr>
+        <p:spPr>
+          <a:xfrm>
+            <a:off x="914400" y="2194560"/>
+            <a:ext cx="10332720" cy="2560320"/>
+          </a:xfrm>
+          <a:prstGeom prst="rect">
+            <a:avLst/>
+          </a:prstGeom>
+          <a:noFill/>
+        </p:spPr>
+        <p:txBody>
+          <a:bodyPr wrap="square" anchor="t" lIns="50800" rIns="50800" tIns="25400" bIns="25400">
+            <a:spAutoFit/>
+          </a:bodyPr>
+          <a:lstStyle/>
+          <a:p>
+            <a:pPr algn="ctr">
+              <a:lnSpc>
+                <a:spcPct val="115000"/>
+              </a:lnSpc>
+              <a:spcAft>
+                <a:spcPts val="1200"/>
+              </a:spcAft>
+            </a:pPr>
+            <a:r>
+              <a:rPr sz="4000" b="1">
+                <a:solidFill>
+                  <a:srgbClr val="FFFFFF"/>
+                </a:solidFill>
+                <a:latin typeface="微軟正黑體"/>
+                <a:ea typeface="微軟正黑體"/>
+                <a:cs typeface="微軟正黑體"/>
+              </a:rPr>
+              <a:t>🌻 我們的約定</a:t>
+            </a:r>
+          </a:p>
+          <a:p>
+            <a:pPr algn="ctr">
+              <a:lnSpc>
+                <a:spcPct val="115000"/>
+              </a:lnSpc>
+              <a:spcAft>
+                <a:spcPts val="1200"/>
+              </a:spcAft>
+            </a:pPr>
+            <a:r>
+              <a:rPr sz="2400" b="0">
+                <a:solidFill>
+                  <a:srgbClr val="EAFBEA"/>
+                </a:solidFill>
+                <a:latin typeface="微軟正黑體"/>
+                <a:ea typeface="微軟正黑體"/>
+                <a:cs typeface="微軟正黑體"/>
+              </a:rPr>
+              <a:t>這 16 週，孩子不只帶走 8 件作品，</a:t>
+            </a:r>
+          </a:p>
+          <a:p>
+            <a:pPr algn="ctr">
+              <a:lnSpc>
+                <a:spcPct val="115000"/>
+              </a:lnSpc>
+              <a:spcAft>
+                <a:spcPts val="1200"/>
+              </a:spcAft>
+            </a:pPr>
+            <a:r>
+              <a:rPr sz="2400" b="0">
+                <a:solidFill>
+                  <a:srgbClr val="EAFBEA"/>
+                </a:solidFill>
+                <a:latin typeface="微軟正黑體"/>
+                <a:ea typeface="微軟正黑體"/>
+                <a:cs typeface="微軟正黑體"/>
+              </a:rPr>
+              <a:t>更帶走一座「屬於自己的生命花園」——</a:t>
+            </a:r>
+          </a:p>
+          <a:p>
+            <a:pPr algn="ctr">
+              <a:lnSpc>
+                <a:spcPct val="115000"/>
+              </a:lnSpc>
+              <a:spcAft>
+                <a:spcPts val="1200"/>
+              </a:spcAft>
+            </a:pPr>
+            <a:r>
+              <a:rPr sz="2400" b="1">
+                <a:solidFill>
+                  <a:srgbClr val="FFF9C4"/>
+                </a:solidFill>
+                <a:latin typeface="微軟正黑體"/>
+                <a:ea typeface="微軟正黑體"/>
+                <a:cs typeface="微軟正黑體"/>
+              </a:rPr>
+              <a:t>知道自己有光、會長大、被愛著，也能去愛人與這個世界。</a:t>
             </a:r>
           </a:p>
         </p:txBody>
